--- a/sayt/media/resources/2026/10/mehnat-muhofazasi-02-mavzu.pptx
+++ b/sayt/media/resources/2026/10/mehnat-muhofazasi-02-mavzu.pptx
@@ -10542,11 +10542,11 @@
         <p:spPr>
           <a:xfrm>
             <a:off x="731520" y="1645158"/>
-            <a:ext cx="5204307" cy="1310894"/>
+            <a:ext cx="5204307" cy="2080641"/>
           </a:xfrm>
           <a:prstGeom prst="roundRect">
             <a:avLst>
-              <a:gd name="adj" fmla="val 5580"/>
+              <a:gd name="adj" fmla="val 3515"/>
             </a:avLst>
           </a:prstGeom>
           <a:solidFill>
@@ -10590,7 +10590,7 @@
         <p:spPr>
           <a:xfrm>
             <a:off x="731520" y="1645158"/>
-            <a:ext cx="73152" cy="1310894"/>
+            <a:ext cx="73152" cy="2080641"/>
           </a:xfrm>
           <a:prstGeom prst="rect">
             <a:avLst/>
@@ -10634,7 +10634,7 @@
         <p:spPr>
           <a:xfrm>
             <a:off x="1005840" y="1809750"/>
-            <a:ext cx="4936991" cy="337819"/>
+            <a:ext cx="4936991" cy="367029"/>
           </a:xfrm>
           <a:prstGeom prst="rect">
             <a:avLst/>
@@ -10649,11 +10649,11 @@
           <a:p>
             <a:pPr algn="l">
               <a:lnSpc>
-                <a:spcPts val="2300"/>
+                <a:spcPts val="2529"/>
               </a:lnSpc>
             </a:pPr>
             <a:r>
-              <a:rPr sz="2000" b="1">
+              <a:rPr sz="2200" b="1">
                 <a:solidFill>
                   <a:srgbClr val="1B2A4A"/>
                 </a:solidFill>
@@ -10672,8 +10672,8 @@
         </p:nvSpPr>
         <p:spPr>
           <a:xfrm>
-            <a:off x="1005840" y="2193290"/>
-            <a:ext cx="4936991" cy="607060"/>
+            <a:off x="1005840" y="2222500"/>
+            <a:ext cx="4936991" cy="986790"/>
           </a:xfrm>
           <a:prstGeom prst="rect">
             <a:avLst/>
@@ -10688,27 +10688,37 @@
           <a:p>
             <a:pPr algn="l">
               <a:lnSpc>
-                <a:spcPts val="2210"/>
+                <a:spcPts val="2470"/>
               </a:lnSpc>
             </a:pPr>
             <a:r>
-              <a:rPr sz="1700" b="0">
+              <a:rPr sz="1900" b="0">
                 <a:solidFill>
                   <a:srgbClr val="3A4560"/>
                 </a:solidFill>
                 <a:latin typeface="Segoe UI"/>
               </a:rPr>
-              <a:t>— asab tizimi, nafas olish va yurak faoliyatining</a:t>
+              <a:t>Asab tizimi, nafas olish va yurak</a:t>
             </a:r>
             <a:br/>
             <a:r>
-              <a:rPr sz="1700" b="0">
+              <a:rPr sz="1900" b="0">
                 <a:solidFill>
                   <a:srgbClr val="3A4560"/>
                 </a:solidFill>
                 <a:latin typeface="Segoe UI"/>
               </a:rPr>
-              <a:t>buzilishi; eng xavflisi — yurakning to‘xtashi.</a:t>
+              <a:t>faoliyatining buzilishi; eng xavflisi —</a:t>
+            </a:r>
+            <a:br/>
+            <a:r>
+              <a:rPr sz="1900" b="0">
+                <a:solidFill>
+                  <a:srgbClr val="3A4560"/>
+                </a:solidFill>
+                <a:latin typeface="Segoe UI"/>
+              </a:rPr>
+              <a:t>yurakning to‘xtashi.</a:t>
             </a:r>
           </a:p>
         </p:txBody>
@@ -10722,11 +10732,11 @@
         <p:spPr>
           <a:xfrm>
             <a:off x="6255867" y="1645158"/>
-            <a:ext cx="5204307" cy="1310894"/>
+            <a:ext cx="5204307" cy="2080641"/>
           </a:xfrm>
           <a:prstGeom prst="roundRect">
             <a:avLst>
-              <a:gd name="adj" fmla="val 5580"/>
+              <a:gd name="adj" fmla="val 3515"/>
             </a:avLst>
           </a:prstGeom>
           <a:solidFill>
@@ -10770,7 +10780,7 @@
         <p:spPr>
           <a:xfrm>
             <a:off x="6255867" y="1645158"/>
-            <a:ext cx="73152" cy="1310894"/>
+            <a:ext cx="73152" cy="2080641"/>
           </a:xfrm>
           <a:prstGeom prst="rect">
             <a:avLst/>
@@ -10814,7 +10824,7 @@
         <p:spPr>
           <a:xfrm>
             <a:off x="6530187" y="1809750"/>
-            <a:ext cx="4936991" cy="337819"/>
+            <a:ext cx="4936991" cy="367029"/>
           </a:xfrm>
           <a:prstGeom prst="rect">
             <a:avLst/>
@@ -10829,11 +10839,11 @@
           <a:p>
             <a:pPr algn="l">
               <a:lnSpc>
-                <a:spcPts val="2300"/>
+                <a:spcPts val="2529"/>
               </a:lnSpc>
             </a:pPr>
             <a:r>
-              <a:rPr sz="2000" b="1">
+              <a:rPr sz="2200" b="1">
                 <a:solidFill>
                   <a:srgbClr val="1B2A4A"/>
                 </a:solidFill>
@@ -10852,8 +10862,8 @@
         </p:nvSpPr>
         <p:spPr>
           <a:xfrm>
-            <a:off x="6530187" y="2193290"/>
-            <a:ext cx="4936991" cy="607060"/>
+            <a:off x="6530187" y="2222500"/>
+            <a:ext cx="4936991" cy="986790"/>
           </a:xfrm>
           <a:prstGeom prst="rect">
             <a:avLst/>
@@ -10868,225 +10878,55 @@
           <a:p>
             <a:pPr algn="l">
               <a:lnSpc>
-                <a:spcPts val="2210"/>
+                <a:spcPts val="2470"/>
               </a:lnSpc>
             </a:pPr>
             <a:r>
-              <a:rPr sz="1700" b="0">
+              <a:rPr sz="1900" b="0">
                 <a:solidFill>
                   <a:srgbClr val="3A4560"/>
                 </a:solidFill>
                 <a:latin typeface="Segoe UI"/>
               </a:rPr>
-              <a:t>— qon va boshqa suyuqliklarning parchalanishi,</a:t>
+              <a:t>Qon va boshqa suyuqliklarning</a:t>
             </a:r>
             <a:br/>
             <a:r>
-              <a:rPr sz="1700" b="0">
+              <a:rPr sz="1900" b="0">
                 <a:solidFill>
                   <a:srgbClr val="3A4560"/>
                 </a:solidFill>
                 <a:latin typeface="Segoe UI"/>
               </a:rPr>
-              <a:t>ularning fizik-kimyoviy tarkibi buzilishi.</a:t>
+              <a:t>parchalanishi, ularning fizik-kimyoviy tarkibi</a:t>
             </a:r>
-          </a:p>
-        </p:txBody>
-      </p:sp>
-      <p:sp>
-        <p:nvSpPr>
-          <p:cNvPr id="45" name="Rounded Rectangle 44"/>
-          <p:cNvSpPr/>
-          <p:nvPr/>
-        </p:nvSpPr>
-        <p:spPr>
-          <a:xfrm>
-            <a:off x="731520" y="3184652"/>
-            <a:ext cx="5204307" cy="1310894"/>
-          </a:xfrm>
-          <a:prstGeom prst="roundRect">
-            <a:avLst>
-              <a:gd name="adj" fmla="val 5580"/>
-            </a:avLst>
-          </a:prstGeom>
-          <a:solidFill>
-            <a:srgbClr val="FBF6EC"/>
-          </a:solidFill>
-          <a:ln w="12700">
-            <a:solidFill>
-              <a:srgbClr val="D8C8AE"/>
-            </a:solidFill>
-          </a:ln>
-          <a:effectLst/>
-        </p:spPr>
-        <p:style>
-          <a:lnRef idx="1">
-            <a:schemeClr val="accent1"/>
-          </a:lnRef>
-          <a:fillRef idx="3">
-            <a:schemeClr val="accent1"/>
-          </a:fillRef>
-          <a:effectRef idx="2">
-            <a:schemeClr val="accent1"/>
-          </a:effectRef>
-          <a:fontRef idx="minor">
-            <a:schemeClr val="lt1"/>
-          </a:fontRef>
-        </p:style>
-        <p:txBody>
-          <a:bodyPr rtlCol="0" anchor="ctr"/>
-          <a:lstStyle/>
-          <a:p>
-            <a:pPr algn="ctr"/>
-          </a:p>
-        </p:txBody>
-      </p:sp>
-      <p:sp>
-        <p:nvSpPr>
-          <p:cNvPr id="46" name="Rectangle 45"/>
-          <p:cNvSpPr/>
-          <p:nvPr/>
-        </p:nvSpPr>
-        <p:spPr>
-          <a:xfrm>
-            <a:off x="731520" y="3184652"/>
-            <a:ext cx="73152" cy="1310894"/>
-          </a:xfrm>
-          <a:prstGeom prst="rect">
-            <a:avLst/>
-          </a:prstGeom>
-          <a:solidFill>
-            <a:srgbClr val="C2562D"/>
-          </a:solidFill>
-          <a:ln>
-            <a:noFill/>
-          </a:ln>
-          <a:effectLst/>
-        </p:spPr>
-        <p:style>
-          <a:lnRef idx="1">
-            <a:schemeClr val="accent1"/>
-          </a:lnRef>
-          <a:fillRef idx="3">
-            <a:schemeClr val="accent1"/>
-          </a:fillRef>
-          <a:effectRef idx="2">
-            <a:schemeClr val="accent1"/>
-          </a:effectRef>
-          <a:fontRef idx="minor">
-            <a:schemeClr val="lt1"/>
-          </a:fontRef>
-        </p:style>
-        <p:txBody>
-          <a:bodyPr rtlCol="0" anchor="ctr"/>
-          <a:lstStyle/>
-          <a:p>
-            <a:pPr algn="ctr"/>
-          </a:p>
-        </p:txBody>
-      </p:sp>
-      <p:sp>
-        <p:nvSpPr>
-          <p:cNvPr id="47" name="TextBox 46"/>
-          <p:cNvSpPr txBox="1"/>
-          <p:nvPr/>
-        </p:nvSpPr>
-        <p:spPr>
-          <a:xfrm>
-            <a:off x="1005840" y="3349244"/>
-            <a:ext cx="4936991" cy="352424"/>
-          </a:xfrm>
-          <a:prstGeom prst="rect">
-            <a:avLst/>
-          </a:prstGeom>
-          <a:noFill/>
-        </p:spPr>
-        <p:txBody>
-          <a:bodyPr wrap="square" lIns="0" rIns="0" tIns="0" bIns="0" anchor="t">
-            <a:spAutoFit/>
-          </a:bodyPr>
-          <a:lstStyle/>
-          <a:p>
-            <a:pPr algn="l">
-              <a:lnSpc>
-                <a:spcPts val="2415"/>
-              </a:lnSpc>
-            </a:pPr>
+            <a:br/>
             <a:r>
-              <a:rPr sz="2100" b="1">
-                <a:solidFill>
-                  <a:srgbClr val="1B2A4A"/>
-                </a:solidFill>
-                <a:latin typeface="Georgia"/>
-              </a:rPr>
-              <a:t>Insonning umumiy holati</a:t>
-            </a:r>
-          </a:p>
-        </p:txBody>
-      </p:sp>
-      <p:sp>
-        <p:nvSpPr>
-          <p:cNvPr id="48" name="TextBox 47"/>
-          <p:cNvSpPr txBox="1"/>
-          <p:nvPr/>
-        </p:nvSpPr>
-        <p:spPr>
-          <a:xfrm>
-            <a:off x="1005840" y="3747389"/>
-            <a:ext cx="4936991" cy="640080"/>
-          </a:xfrm>
-          <a:prstGeom prst="rect">
-            <a:avLst/>
-          </a:prstGeom>
-          <a:noFill/>
-        </p:spPr>
-        <p:txBody>
-          <a:bodyPr wrap="square" lIns="0" rIns="0" tIns="0" bIns="0" anchor="t">
-            <a:spAutoFit/>
-          </a:bodyPr>
-          <a:lstStyle/>
-          <a:p>
-            <a:pPr algn="l">
-              <a:lnSpc>
-                <a:spcPts val="2340"/>
-              </a:lnSpc>
-            </a:pPr>
-            <a:r>
-              <a:rPr sz="1800" b="0">
+              <a:rPr sz="1900" b="0">
                 <a:solidFill>
                   <a:srgbClr val="3A4560"/>
                 </a:solidFill>
                 <a:latin typeface="Segoe UI"/>
               </a:rPr>
-              <a:t>Charchoq, kasallik, hayajon tokka chidamlilikni</a:t>
+              <a:t>buzilishi.</a:t>
             </a:r>
-            <a:br/>
-            <a:r>
-              <a:rPr sz="1800" b="0">
-                <a:solidFill>
-                  <a:srgbClr val="3A4560"/>
-                </a:solidFill>
-                <a:latin typeface="Segoe UI"/>
-              </a:rPr>
-              <a:t>pasaytiradi.</a:t>
-            </a:r>
-          </a:p>
-        </p:txBody>
-      </p:sp>
-      <p:sp>
-        <p:nvSpPr>
-          <p:cNvPr id="49" name="Rounded Rectangle 48"/>
+          </a:p>
+        </p:txBody>
+      </p:sp>
+      <p:sp>
+        <p:nvSpPr>
+          <p:cNvPr id="45" name="Rounded Rectangle 44"/>
           <p:cNvSpPr/>
           <p:nvPr/>
         </p:nvSpPr>
         <p:spPr>
           <a:xfrm>
-            <a:off x="6255867" y="3184652"/>
-            <a:ext cx="5204307" cy="1310894"/>
+            <a:off x="731520" y="3954398"/>
+            <a:ext cx="5204307" cy="2080641"/>
           </a:xfrm>
           <a:prstGeom prst="roundRect">
             <a:avLst>
-              <a:gd name="adj" fmla="val 5580"/>
+              <a:gd name="adj" fmla="val 3515"/>
             </a:avLst>
           </a:prstGeom>
           <a:solidFill>
@@ -11123,14 +10963,14 @@
       </p:sp>
       <p:sp>
         <p:nvSpPr>
-          <p:cNvPr id="50" name="Rectangle 49"/>
+          <p:cNvPr id="46" name="Rectangle 45"/>
           <p:cNvSpPr/>
           <p:nvPr/>
         </p:nvSpPr>
         <p:spPr>
           <a:xfrm>
-            <a:off x="6255867" y="3184652"/>
-            <a:ext cx="73152" cy="1310894"/>
+            <a:off x="731520" y="3954398"/>
+            <a:ext cx="73152" cy="2080641"/>
           </a:xfrm>
           <a:prstGeom prst="rect">
             <a:avLst/>
@@ -11167,14 +11007,14 @@
       </p:sp>
       <p:sp>
         <p:nvSpPr>
-          <p:cNvPr id="51" name="TextBox 50"/>
+          <p:cNvPr id="47" name="TextBox 46"/>
           <p:cNvSpPr txBox="1"/>
           <p:nvPr/>
         </p:nvSpPr>
         <p:spPr>
           <a:xfrm>
-            <a:off x="6530187" y="3349244"/>
-            <a:ext cx="4936991" cy="352424"/>
+            <a:off x="1005840" y="4118990"/>
+            <a:ext cx="4936991" cy="367029"/>
           </a:xfrm>
           <a:prstGeom prst="rect">
             <a:avLst/>
@@ -11189,11 +11029,11 @@
           <a:p>
             <a:pPr algn="l">
               <a:lnSpc>
-                <a:spcPts val="2415"/>
+                <a:spcPts val="2529"/>
               </a:lnSpc>
             </a:pPr>
             <a:r>
-              <a:rPr sz="2100" b="1">
+              <a:rPr sz="2200" b="1">
                 <a:solidFill>
                   <a:srgbClr val="1B2A4A"/>
                 </a:solidFill>
@@ -11206,14 +11046,14 @@
       </p:sp>
       <p:sp>
         <p:nvSpPr>
-          <p:cNvPr id="52" name="TextBox 51"/>
+          <p:cNvPr id="48" name="TextBox 47"/>
           <p:cNvSpPr txBox="1"/>
           <p:nvPr/>
         </p:nvSpPr>
         <p:spPr>
           <a:xfrm>
-            <a:off x="6530187" y="3747389"/>
-            <a:ext cx="4936991" cy="640080"/>
+            <a:off x="1005840" y="4531740"/>
+            <a:ext cx="4936991" cy="673100"/>
           </a:xfrm>
           <a:prstGeom prst="rect">
             <a:avLst/>
@@ -11228,21 +11068,21 @@
           <a:p>
             <a:pPr algn="l">
               <a:lnSpc>
-                <a:spcPts val="2340"/>
+                <a:spcPts val="2470"/>
               </a:lnSpc>
             </a:pPr>
             <a:r>
-              <a:rPr sz="1800" b="0">
+              <a:rPr sz="1900" b="0">
                 <a:solidFill>
                   <a:srgbClr val="3A4560"/>
                 </a:solidFill>
                 <a:latin typeface="Segoe UI"/>
               </a:rPr>
-              <a:t>— mushaklarning keskin qisqarishi,</a:t>
+              <a:t>Mushaklarning keskin qisqarishi,</a:t>
             </a:r>
             <a:br/>
             <a:r>
-              <a:rPr sz="1800" b="0">
+              <a:rPr sz="1900" b="0">
                 <a:solidFill>
                   <a:srgbClr val="3A4560"/>
                 </a:solidFill>
@@ -11255,18 +11095,18 @@
       </p:sp>
       <p:sp>
         <p:nvSpPr>
-          <p:cNvPr id="53" name="Rounded Rectangle 52"/>
+          <p:cNvPr id="49" name="Rounded Rectangle 48"/>
           <p:cNvSpPr/>
           <p:nvPr/>
         </p:nvSpPr>
         <p:spPr>
           <a:xfrm>
-            <a:off x="731520" y="4724146"/>
-            <a:ext cx="5204307" cy="1310894"/>
+            <a:off x="6255867" y="3954398"/>
+            <a:ext cx="5204307" cy="2080641"/>
           </a:xfrm>
           <a:prstGeom prst="roundRect">
             <a:avLst>
-              <a:gd name="adj" fmla="val 5580"/>
+              <a:gd name="adj" fmla="val 3515"/>
             </a:avLst>
           </a:prstGeom>
           <a:solidFill>
@@ -11303,14 +11143,14 @@
       </p:sp>
       <p:sp>
         <p:nvSpPr>
-          <p:cNvPr id="54" name="Rectangle 53"/>
+          <p:cNvPr id="50" name="Rectangle 49"/>
           <p:cNvSpPr/>
           <p:nvPr/>
         </p:nvSpPr>
         <p:spPr>
           <a:xfrm>
-            <a:off x="731520" y="4724146"/>
-            <a:ext cx="73152" cy="1310894"/>
+            <a:off x="6255867" y="3954398"/>
+            <a:ext cx="73152" cy="2080641"/>
           </a:xfrm>
           <a:prstGeom prst="rect">
             <a:avLst/>
@@ -11347,14 +11187,14 @@
       </p:sp>
       <p:sp>
         <p:nvSpPr>
-          <p:cNvPr id="55" name="TextBox 54"/>
+          <p:cNvPr id="51" name="TextBox 50"/>
           <p:cNvSpPr txBox="1"/>
           <p:nvPr/>
         </p:nvSpPr>
         <p:spPr>
           <a:xfrm>
-            <a:off x="1005840" y="4888738"/>
-            <a:ext cx="4936991" cy="352424"/>
+            <a:off x="6530187" y="4118990"/>
+            <a:ext cx="4936991" cy="367029"/>
           </a:xfrm>
           <a:prstGeom prst="rect">
             <a:avLst/>
@@ -11369,191 +11209,11 @@
           <a:p>
             <a:pPr algn="l">
               <a:lnSpc>
-                <a:spcPts val="2415"/>
+                <a:spcPts val="2529"/>
               </a:lnSpc>
             </a:pPr>
             <a:r>
-              <a:rPr sz="2100" b="1">
-                <a:solidFill>
-                  <a:srgbClr val="1B2A4A"/>
-                </a:solidFill>
-                <a:latin typeface="Georgia"/>
-              </a:rPr>
-              <a:t>Teri holati</a:t>
-            </a:r>
-          </a:p>
-        </p:txBody>
-      </p:sp>
-      <p:sp>
-        <p:nvSpPr>
-          <p:cNvPr id="56" name="TextBox 55"/>
-          <p:cNvSpPr txBox="1"/>
-          <p:nvPr/>
-        </p:nvSpPr>
-        <p:spPr>
-          <a:xfrm>
-            <a:off x="1005840" y="5286882"/>
-            <a:ext cx="4936991" cy="640080"/>
-          </a:xfrm>
-          <a:prstGeom prst="rect">
-            <a:avLst/>
-          </a:prstGeom>
-          <a:noFill/>
-        </p:spPr>
-        <p:txBody>
-          <a:bodyPr wrap="square" lIns="0" rIns="0" tIns="0" bIns="0" anchor="t">
-            <a:spAutoFit/>
-          </a:bodyPr>
-          <a:lstStyle/>
-          <a:p>
-            <a:pPr algn="l">
-              <a:lnSpc>
-                <a:spcPts val="2340"/>
-              </a:lnSpc>
-            </a:pPr>
-            <a:r>
-              <a:rPr sz="1800" b="0">
-                <a:solidFill>
-                  <a:srgbClr val="3A4560"/>
-                </a:solidFill>
-                <a:latin typeface="Segoe UI"/>
-              </a:rPr>
-              <a:t>Nam yoki terlagan terining qarshiligi bir necha</a:t>
-            </a:r>
-            <a:br/>
-            <a:r>
-              <a:rPr sz="1800" b="0">
-                <a:solidFill>
-                  <a:srgbClr val="3A4560"/>
-                </a:solidFill>
-                <a:latin typeface="Segoe UI"/>
-              </a:rPr>
-              <a:t>barobar kamayadi.</a:t>
-            </a:r>
-          </a:p>
-        </p:txBody>
-      </p:sp>
-      <p:sp>
-        <p:nvSpPr>
-          <p:cNvPr id="57" name="Rounded Rectangle 56"/>
-          <p:cNvSpPr/>
-          <p:nvPr/>
-        </p:nvSpPr>
-        <p:spPr>
-          <a:xfrm>
-            <a:off x="6255867" y="4724146"/>
-            <a:ext cx="5204307" cy="1310894"/>
-          </a:xfrm>
-          <a:prstGeom prst="roundRect">
-            <a:avLst>
-              <a:gd name="adj" fmla="val 5580"/>
-            </a:avLst>
-          </a:prstGeom>
-          <a:solidFill>
-            <a:srgbClr val="FBF6EC"/>
-          </a:solidFill>
-          <a:ln w="12700">
-            <a:solidFill>
-              <a:srgbClr val="D8C8AE"/>
-            </a:solidFill>
-          </a:ln>
-          <a:effectLst/>
-        </p:spPr>
-        <p:style>
-          <a:lnRef idx="1">
-            <a:schemeClr val="accent1"/>
-          </a:lnRef>
-          <a:fillRef idx="3">
-            <a:schemeClr val="accent1"/>
-          </a:fillRef>
-          <a:effectRef idx="2">
-            <a:schemeClr val="accent1"/>
-          </a:effectRef>
-          <a:fontRef idx="minor">
-            <a:schemeClr val="lt1"/>
-          </a:fontRef>
-        </p:style>
-        <p:txBody>
-          <a:bodyPr rtlCol="0" anchor="ctr"/>
-          <a:lstStyle/>
-          <a:p>
-            <a:pPr algn="ctr"/>
-          </a:p>
-        </p:txBody>
-      </p:sp>
-      <p:sp>
-        <p:nvSpPr>
-          <p:cNvPr id="58" name="Rectangle 57"/>
-          <p:cNvSpPr/>
-          <p:nvPr/>
-        </p:nvSpPr>
-        <p:spPr>
-          <a:xfrm>
-            <a:off x="6255867" y="4724146"/>
-            <a:ext cx="73152" cy="1310894"/>
-          </a:xfrm>
-          <a:prstGeom prst="rect">
-            <a:avLst/>
-          </a:prstGeom>
-          <a:solidFill>
-            <a:srgbClr val="C2562D"/>
-          </a:solidFill>
-          <a:ln>
-            <a:noFill/>
-          </a:ln>
-          <a:effectLst/>
-        </p:spPr>
-        <p:style>
-          <a:lnRef idx="1">
-            <a:schemeClr val="accent1"/>
-          </a:lnRef>
-          <a:fillRef idx="3">
-            <a:schemeClr val="accent1"/>
-          </a:fillRef>
-          <a:effectRef idx="2">
-            <a:schemeClr val="accent1"/>
-          </a:effectRef>
-          <a:fontRef idx="minor">
-            <a:schemeClr val="lt1"/>
-          </a:fontRef>
-        </p:style>
-        <p:txBody>
-          <a:bodyPr rtlCol="0" anchor="ctr"/>
-          <a:lstStyle/>
-          <a:p>
-            <a:pPr algn="ctr"/>
-          </a:p>
-        </p:txBody>
-      </p:sp>
-      <p:sp>
-        <p:nvSpPr>
-          <p:cNvPr id="59" name="TextBox 58"/>
-          <p:cNvSpPr txBox="1"/>
-          <p:nvPr/>
-        </p:nvSpPr>
-        <p:spPr>
-          <a:xfrm>
-            <a:off x="6530187" y="4888738"/>
-            <a:ext cx="4936991" cy="352424"/>
-          </a:xfrm>
-          <a:prstGeom prst="rect">
-            <a:avLst/>
-          </a:prstGeom>
-          <a:noFill/>
-        </p:spPr>
-        <p:txBody>
-          <a:bodyPr wrap="square" lIns="0" rIns="0" tIns="0" bIns="0" anchor="t">
-            <a:spAutoFit/>
-          </a:bodyPr>
-          <a:lstStyle/>
-          <a:p>
-            <a:pPr algn="l">
-              <a:lnSpc>
-                <a:spcPts val="2415"/>
-              </a:lnSpc>
-            </a:pPr>
-            <a:r>
-              <a:rPr sz="2100" b="1">
+              <a:rPr sz="2200" b="1">
                 <a:solidFill>
                   <a:srgbClr val="1B2A4A"/>
                 </a:solidFill>
@@ -11566,14 +11226,14 @@
       </p:sp>
       <p:sp>
         <p:nvSpPr>
-          <p:cNvPr id="60" name="TextBox 59"/>
+          <p:cNvPr id="52" name="TextBox 51"/>
           <p:cNvSpPr txBox="1"/>
           <p:nvPr/>
         </p:nvSpPr>
         <p:spPr>
           <a:xfrm>
-            <a:off x="6530187" y="5286882"/>
-            <a:ext cx="4936991" cy="640080"/>
+            <a:off x="6530187" y="4531740"/>
+            <a:ext cx="4936991" cy="673100"/>
           </a:xfrm>
           <a:prstGeom prst="rect">
             <a:avLst/>
@@ -11588,21 +11248,21 @@
           <a:p>
             <a:pPr algn="l">
               <a:lnSpc>
-                <a:spcPts val="2340"/>
+                <a:spcPts val="2470"/>
               </a:lnSpc>
             </a:pPr>
             <a:r>
-              <a:rPr sz="1800" b="0">
+              <a:rPr sz="1900" b="0">
                 <a:solidFill>
                   <a:srgbClr val="3A4560"/>
                 </a:solidFill>
                 <a:latin typeface="Segoe UI"/>
               </a:rPr>
-              <a:t>— tanada kuyishlar, to‘qima va qon</a:t>
+              <a:t>Tanada kuyishlar, to‘qima va qon</a:t>
             </a:r>
             <a:br/>
             <a:r>
-              <a:rPr sz="1800" b="0">
+              <a:rPr sz="1900" b="0">
                 <a:solidFill>
                   <a:srgbClr val="3A4560"/>
                 </a:solidFill>
